--- a/dist/초6/사회·역사/현대사회와평화/초6_사회·역사_현대사회와평화_01_민주주의의발전.pptx
+++ b/dist/초6/사회·역사/현대사회와평화/초6_사회·역사_현대사회와평화_01_민주주의의발전.pptx
@@ -121,13 +121,13 @@
   <p:extLst>
     <p:ext uri="{521415D9-36F7-43E2-AB2F-B90AF26B5E84}">
       <p14:sectionLst xmlns:p14="http://schemas.microsoft.com/office/powerpoint/2010/main">
-        <p14:section name="도입" id="{161593d3-c3a8-6f6c-4b23-c6c26eac384c}">
+        <p14:section name="도입" id="{777b5444-1b70-f8cc-fcfc-d770f93b50fb}">
           <p14:sldIdLst>
             <p14:sldId id="256"/>
             <p14:sldId id="257"/>
           </p14:sldIdLst>
         </p14:section>
-        <p14:section name="개념" id="{b42c9ec1-8d94-890c-4053-b3e082340cc3}">
+        <p14:section name="개념" id="{830f6e37-45c0-f0e0-4bcc-d4c4c94bbce6}">
           <p14:sldIdLst>
             <p14:sldId id="258"/>
             <p14:sldId id="259"/>
@@ -137,34 +137,34 @@
             <p14:sldId id="266"/>
           </p14:sldIdLst>
         </p14:section>
-        <p14:section name="연습" id="{e6d1b7dd-cc97-d689-17fd-07e91662391e}">
+        <p14:section name="연습" id="{d60844bd-87b6-d341-464b-303fa44c9882}">
           <p14:sldIdLst>
             <p14:sldId id="261"/>
             <p14:sldId id="264"/>
             <p14:sldId id="265"/>
           </p14:sldIdLst>
         </p14:section>
-        <p14:section name="개념" id="{4f8faad0-4eab-ddf0-8497-e2d47e1af43a}">
+        <p14:section name="개념" id="{c56128cb-5906-6b2f-841c-6a167301ba46}">
           <p14:sldIdLst/>
         </p14:section>
-        <p14:section name="연습" id="{8ae69d9b-87fb-7dd3-d0d7-36e403080983}">
+        <p14:section name="연습" id="{f1ce9cb4-4c73-612d-a84d-f463ea17462e}">
           <p14:sldIdLst/>
         </p14:section>
-        <p14:section name="개념" id="{5276b587-f7ab-d25e-84f8-59b057aa7da5}">
+        <p14:section name="개념" id="{22608ebf-3726-32e5-66a5-d5b11b68a622}">
           <p14:sldIdLst/>
         </p14:section>
-        <p14:section name="확인" id="{7c3ea867-041f-943e-e789-1690d923781f}">
+        <p14:section name="확인" id="{3b017145-897c-b447-7ce5-e88e0bbd87c8}">
           <p14:sldIdLst>
             <p14:sldId id="267"/>
             <p14:sldId id="268"/>
           </p14:sldIdLst>
         </p14:section>
-        <p14:section name="정리" id="{94f23249-4ad8-e5d1-4c6c-aa82c50153b0}">
+        <p14:section name="정리" id="{bc2f29c9-8171-2062-fd76-f7e69af893b6}">
           <p14:sldIdLst>
             <p14:sldId id="269"/>
           </p14:sldIdLst>
         </p14:section>
-        <p14:section name="보충" id="{0f36ce2d-2e0c-52b2-b90e-3b71865ee581}">
+        <p14:section name="보충" id="{15ad0577-babc-316f-089d-e709a608c386}">
           <p14:sldIdLst>
             <p14:sldId id="270"/>
           </p14:sldIdLst>
